--- a/media/resources/files/ButunSandardyJanaOnduktardyKoboytuuBoluu-10-100-1000-KataryMNTort.pptx
+++ b/media/resources/files/ButunSandardyJanaOnduktardyKoboytuuBoluu-10-100-1000-KataryMNTort.pptx
@@ -18263,7 +18263,7 @@
                 <a:ea typeface="+mn-ea"/>
                 <a:cs typeface="+mn-cs"/>
               </a:rPr>
-              <a:t>Турдуу пикирлер учун ыраазычылык билдиребиз.</a:t>
+              <a:t>Түрдүү пикирлер үчүн ыраазычылык билдиребиз.</a:t>
             </a:r>
           </a:p>
           <a:p>

--- a/media/resources/files/ButunSandardyJanaOnduktardyKoboytuuBoluu-10-100-1000-KataryMNTort.pptx
+++ b/media/resources/files/ButunSandardyJanaOnduktardyKoboytuuBoluu-10-100-1000-KataryMNTort.pptx
@@ -4662,7 +4662,7 @@
                           <a:ea typeface="+mn-ea"/>
                           <a:cs typeface="+mn-cs"/>
                         </a:rPr>
-                        <a:t>2.1</a:t>
+                        <a:t>2,1</a:t>
                       </a:r>
                     </a:p>
                   </a:txBody>
@@ -4911,7 +4911,7 @@
                           <a:ea typeface="+mn-ea"/>
                           <a:cs typeface="+mn-cs"/>
                         </a:rPr>
-                        <a:t>0.024</a:t>
+                        <a:t>0,024</a:t>
                       </a:r>
                     </a:p>
                   </a:txBody>
@@ -5084,7 +5084,7 @@
                           <a:ea typeface="+mn-ea"/>
                           <a:cs typeface="+mn-cs"/>
                         </a:rPr>
-                        <a:t>0.3</a:t>
+                        <a:t>0,3</a:t>
                       </a:r>
                     </a:p>
                   </a:txBody>
@@ -5672,7 +5672,7 @@
                           <a:ea typeface="+mn-ea"/>
                           <a:cs typeface="+mn-cs"/>
                         </a:rPr>
-                        <a:t>0.14</a:t>
+                        <a:t>0,14</a:t>
                       </a:r>
                     </a:p>
                   </a:txBody>
@@ -5838,7 +5838,7 @@
                           <a:ea typeface="+mn-ea"/>
                           <a:cs typeface="+mn-cs"/>
                         </a:rPr>
-                        <a:t>0.2</a:t>
+                        <a:t>0,2</a:t>
                       </a:r>
                     </a:p>
                   </a:txBody>
@@ -5921,7 +5921,7 @@
                           <a:ea typeface="+mn-ea"/>
                           <a:cs typeface="+mn-cs"/>
                         </a:rPr>
-                        <a:t>0.6</a:t>
+                        <a:t>0,6</a:t>
                       </a:r>
                     </a:p>
                   </a:txBody>
@@ -6094,7 +6094,7 @@
                           <a:ea typeface="+mn-ea"/>
                           <a:cs typeface="+mn-cs"/>
                         </a:rPr>
-                        <a:t>0.02</a:t>
+                        <a:t>0,02</a:t>
                       </a:r>
                     </a:p>
                   </a:txBody>
@@ -6260,7 +6260,7 @@
                           <a:ea typeface="+mn-ea"/>
                           <a:cs typeface="+mn-cs"/>
                         </a:rPr>
-                        <a:t>0.12</a:t>
+                        <a:t>0,12</a:t>
                       </a:r>
                     </a:p>
                   </a:txBody>
@@ -6599,7 +6599,7 @@
                           <a:ea typeface="+mn-ea"/>
                           <a:cs typeface="+mn-cs"/>
                         </a:rPr>
-                        <a:t>7.02</a:t>
+                        <a:t>7,02</a:t>
                       </a:r>
                     </a:p>
                   </a:txBody>
@@ -6765,7 +6765,7 @@
                           <a:ea typeface="+mn-ea"/>
                           <a:cs typeface="+mn-cs"/>
                         </a:rPr>
-                        <a:t>0.003</a:t>
+                        <a:t>0,003</a:t>
                       </a:r>
                     </a:p>
                   </a:txBody>
@@ -6848,7 +6848,7 @@
                           <a:ea typeface="+mn-ea"/>
                           <a:cs typeface="+mn-cs"/>
                         </a:rPr>
-                        <a:t>0.06</a:t>
+                        <a:t>0,06</a:t>
                       </a:r>
                     </a:p>
                   </a:txBody>
@@ -7014,7 +7014,7 @@
                           <a:ea typeface="+mn-ea"/>
                           <a:cs typeface="+mn-cs"/>
                         </a:rPr>
-                        <a:t>2.2</a:t>
+                        <a:t>2,2</a:t>
                       </a:r>
                     </a:p>
                   </a:txBody>
@@ -7187,7 +7187,7 @@
                           <a:ea typeface="+mn-ea"/>
                           <a:cs typeface="+mn-cs"/>
                         </a:rPr>
-                        <a:t>0.72</a:t>
+                        <a:t>0,72</a:t>
                       </a:r>
                     </a:p>
                   </a:txBody>
@@ -7353,7 +7353,7 @@
                           <a:ea typeface="+mn-ea"/>
                           <a:cs typeface="+mn-cs"/>
                         </a:rPr>
-                        <a:t>0.03</a:t>
+                        <a:t>0,03</a:t>
                       </a:r>
                       <a:endParaRPr kumimoji="0" lang="en-GB" sz="1800" b="0" i="0" u="none" strike="noStrike" kern="1200" cap="none" spc="0" normalizeH="0" baseline="0" noProof="0" dirty="0">
                         <a:ln>
@@ -7450,7 +7450,7 @@
                           <a:ea typeface="+mn-ea"/>
                           <a:cs typeface="+mn-cs"/>
                         </a:rPr>
-                        <a:t>0.4</a:t>
+                        <a:t>0,4</a:t>
                       </a:r>
                     </a:p>
                   </a:txBody>
@@ -7846,7 +7846,7 @@
                           <a:ea typeface="+mn-ea"/>
                           <a:cs typeface="+mn-cs"/>
                         </a:rPr>
-                        <a:t>1.8 × 10</a:t>
+                        <a:t>1,8 × 10</a:t>
                       </a:r>
                     </a:p>
                   </a:txBody>
@@ -8192,7 +8192,7 @@
                           <a:ea typeface="+mn-ea"/>
                           <a:cs typeface="+mn-cs"/>
                         </a:rPr>
-                        <a:t>0.6 ÷ 10</a:t>
+                        <a:t>0,6 ÷ 10</a:t>
                       </a:r>
                     </a:p>
                   </a:txBody>
@@ -8365,7 +8365,7 @@
                           <a:ea typeface="+mn-ea"/>
                           <a:cs typeface="+mn-cs"/>
                         </a:rPr>
-                        <a:t>2.8 ÷ 20</a:t>
+                        <a:t>2,8 ÷ 20</a:t>
                       </a:r>
                     </a:p>
                   </a:txBody>
@@ -8884,7 +8884,7 @@
                           <a:ea typeface="+mn-ea"/>
                           <a:cs typeface="+mn-cs"/>
                         </a:rPr>
-                        <a:t>2.3 × 20</a:t>
+                        <a:t>2,3 × 20</a:t>
                       </a:r>
                     </a:p>
                   </a:txBody>
@@ -9140,7 +9140,7 @@
                           <a:ea typeface="+mn-ea"/>
                           <a:cs typeface="+mn-cs"/>
                         </a:rPr>
-                        <a:t>1.2 × 30</a:t>
+                        <a:t>1,2 × 30</a:t>
                       </a:r>
                     </a:p>
                   </a:txBody>
@@ -9230,7 +9230,7 @@
                           <a:ea typeface="+mn-ea"/>
                           <a:cs typeface="+mn-cs"/>
                         </a:rPr>
-                        <a:t>4.2 × 200</a:t>
+                        <a:t>4,2 × 200</a:t>
                       </a:r>
                     </a:p>
                   </a:txBody>
@@ -9313,7 +9313,7 @@
                           <a:ea typeface="+mn-ea"/>
                           <a:cs typeface="+mn-cs"/>
                         </a:rPr>
-                        <a:t>1.1 × 3000</a:t>
+                        <a:t>1,1 × 3000</a:t>
                       </a:r>
                     </a:p>
                   </a:txBody>
@@ -9403,7 +9403,7 @@
                           <a:ea typeface="+mn-ea"/>
                           <a:cs typeface="+mn-cs"/>
                         </a:rPr>
-                        <a:t>3.4 × 2000</a:t>
+                        <a:t>3,4 × 2000</a:t>
                       </a:r>
                     </a:p>
                   </a:txBody>
@@ -9659,7 +9659,7 @@
                           <a:ea typeface="+mn-ea"/>
                           <a:cs typeface="+mn-cs"/>
                         </a:rPr>
-                        <a:t>3.6 ÷ 30</a:t>
+                        <a:t>3,6 ÷ 30</a:t>
                       </a:r>
                     </a:p>
                   </a:txBody>
@@ -9832,7 +9832,7 @@
                           <a:ea typeface="+mn-ea"/>
                           <a:cs typeface="+mn-cs"/>
                         </a:rPr>
-                        <a:t>2.4 ÷ 100</a:t>
+                        <a:t>2,4 ÷ 100</a:t>
                       </a:r>
                     </a:p>
                   </a:txBody>
@@ -10005,7 +10005,7 @@
                           <a:ea typeface="+mn-ea"/>
                           <a:cs typeface="+mn-cs"/>
                         </a:rPr>
-                        <a:t>1.9 × 1000</a:t>
+                        <a:t>1,9 × 1000</a:t>
                       </a:r>
                     </a:p>
                   </a:txBody>
@@ -10268,7 +10268,7 @@
                           <a:ea typeface="+mn-ea"/>
                           <a:cs typeface="+mn-cs"/>
                         </a:rPr>
-                        <a:t>3.1 × 2000</a:t>
+                        <a:t>3,1 × 2000</a:t>
                       </a:r>
                     </a:p>
                   </a:txBody>
@@ -10351,7 +10351,7 @@
                           <a:ea typeface="+mn-ea"/>
                           <a:cs typeface="+mn-cs"/>
                         </a:rPr>
-                        <a:t>0.2 × 300</a:t>
+                        <a:t>0,2 × 300</a:t>
                       </a:r>
                     </a:p>
                   </a:txBody>
@@ -10441,7 +10441,7 @@
                           <a:ea typeface="+mn-ea"/>
                           <a:cs typeface="+mn-cs"/>
                         </a:rPr>
-                        <a:t>0.9 ÷ 300</a:t>
+                        <a:t>0,9 ÷ 300</a:t>
                       </a:r>
                     </a:p>
                   </a:txBody>
@@ -10614,7 +10614,7 @@
                           <a:ea typeface="+mn-ea"/>
                           <a:cs typeface="+mn-cs"/>
                         </a:rPr>
-                        <a:t>0.9 × 100</a:t>
+                        <a:t>0,9 × 100</a:t>
                       </a:r>
                     </a:p>
                   </a:txBody>
@@ -10697,7 +10697,7 @@
                           <a:ea typeface="+mn-ea"/>
                           <a:cs typeface="+mn-cs"/>
                         </a:rPr>
-                        <a:t>0.3 × 3000</a:t>
+                        <a:t>0,3 × 3000</a:t>
                       </a:r>
                     </a:p>
                   </a:txBody>
@@ -11181,7 +11181,7 @@
                           <a:ea typeface="+mn-ea"/>
                           <a:cs typeface="+mn-cs"/>
                         </a:rPr>
-                        <a:t>2.1</a:t>
+                        <a:t>2,1</a:t>
                       </a:r>
                     </a:p>
                   </a:txBody>
@@ -11430,7 +11430,7 @@
                           <a:ea typeface="+mn-ea"/>
                           <a:cs typeface="+mn-cs"/>
                         </a:rPr>
-                        <a:t>0.024</a:t>
+                        <a:t>0,024</a:t>
                       </a:r>
                     </a:p>
                   </a:txBody>
@@ -11603,7 +11603,7 @@
                           <a:ea typeface="+mn-ea"/>
                           <a:cs typeface="+mn-cs"/>
                         </a:rPr>
-                        <a:t>0.3</a:t>
+                        <a:t>0,3</a:t>
                       </a:r>
                     </a:p>
                   </a:txBody>
@@ -12191,7 +12191,7 @@
                           <a:ea typeface="+mn-ea"/>
                           <a:cs typeface="+mn-cs"/>
                         </a:rPr>
-                        <a:t>0.14</a:t>
+                        <a:t>0,14</a:t>
                       </a:r>
                     </a:p>
                   </a:txBody>
@@ -12357,7 +12357,7 @@
                           <a:ea typeface="+mn-ea"/>
                           <a:cs typeface="+mn-cs"/>
                         </a:rPr>
-                        <a:t>0.2</a:t>
+                        <a:t>0,2</a:t>
                       </a:r>
                     </a:p>
                   </a:txBody>
@@ -12440,7 +12440,7 @@
                           <a:ea typeface="+mn-ea"/>
                           <a:cs typeface="+mn-cs"/>
                         </a:rPr>
-                        <a:t>0.6</a:t>
+                        <a:t>0,6</a:t>
                       </a:r>
                     </a:p>
                   </a:txBody>
@@ -12613,7 +12613,7 @@
                           <a:ea typeface="+mn-ea"/>
                           <a:cs typeface="+mn-cs"/>
                         </a:rPr>
-                        <a:t>0.02</a:t>
+                        <a:t>0,02</a:t>
                       </a:r>
                     </a:p>
                   </a:txBody>
@@ -12779,7 +12779,7 @@
                           <a:ea typeface="+mn-ea"/>
                           <a:cs typeface="+mn-cs"/>
                         </a:rPr>
-                        <a:t>0.12</a:t>
+                        <a:t>0,12</a:t>
                       </a:r>
                     </a:p>
                   </a:txBody>
@@ -13118,7 +13118,7 @@
                           <a:ea typeface="+mn-ea"/>
                           <a:cs typeface="+mn-cs"/>
                         </a:rPr>
-                        <a:t>7.02</a:t>
+                        <a:t>7,02</a:t>
                       </a:r>
                     </a:p>
                   </a:txBody>
@@ -13284,7 +13284,7 @@
                           <a:ea typeface="+mn-ea"/>
                           <a:cs typeface="+mn-cs"/>
                         </a:rPr>
-                        <a:t>0.003</a:t>
+                        <a:t>0,003</a:t>
                       </a:r>
                     </a:p>
                   </a:txBody>
@@ -13367,7 +13367,7 @@
                           <a:ea typeface="+mn-ea"/>
                           <a:cs typeface="+mn-cs"/>
                         </a:rPr>
-                        <a:t>0.06</a:t>
+                        <a:t>0,06</a:t>
                       </a:r>
                     </a:p>
                   </a:txBody>
@@ -13533,7 +13533,7 @@
                           <a:ea typeface="+mn-ea"/>
                           <a:cs typeface="+mn-cs"/>
                         </a:rPr>
-                        <a:t>2.2</a:t>
+                        <a:t>2,2</a:t>
                       </a:r>
                     </a:p>
                   </a:txBody>
@@ -13706,7 +13706,7 @@
                           <a:ea typeface="+mn-ea"/>
                           <a:cs typeface="+mn-cs"/>
                         </a:rPr>
-                        <a:t>0.72</a:t>
+                        <a:t>0,72</a:t>
                       </a:r>
                     </a:p>
                   </a:txBody>
@@ -13872,7 +13872,7 @@
                           <a:ea typeface="+mn-ea"/>
                           <a:cs typeface="+mn-cs"/>
                         </a:rPr>
-                        <a:t>0.03</a:t>
+                        <a:t>0,03</a:t>
                       </a:r>
                       <a:endParaRPr kumimoji="0" lang="en-GB" sz="1800" b="0" i="0" u="none" strike="noStrike" kern="1200" cap="none" spc="0" normalizeH="0" baseline="0" noProof="0" dirty="0">
                         <a:ln>
@@ -13969,7 +13969,7 @@
                           <a:ea typeface="+mn-ea"/>
                           <a:cs typeface="+mn-cs"/>
                         </a:rPr>
-                        <a:t>0.4</a:t>
+                        <a:t>0,4</a:t>
                       </a:r>
                     </a:p>
                   </a:txBody>
@@ -14359,7 +14359,7 @@
                           <a:ea typeface="+mn-ea"/>
                           <a:cs typeface="+mn-cs"/>
                         </a:rPr>
-                        <a:t>1.8 × 10</a:t>
+                        <a:t>1,8 × 10</a:t>
                       </a:r>
                     </a:p>
                   </a:txBody>
@@ -14705,7 +14705,7 @@
                           <a:ea typeface="+mn-ea"/>
                           <a:cs typeface="+mn-cs"/>
                         </a:rPr>
-                        <a:t>0.6 ÷ 10</a:t>
+                        <a:t>0,6 ÷ 10</a:t>
                       </a:r>
                     </a:p>
                   </a:txBody>
@@ -14878,7 +14878,7 @@
                           <a:ea typeface="+mn-ea"/>
                           <a:cs typeface="+mn-cs"/>
                         </a:rPr>
-                        <a:t>2.8 ÷ 20</a:t>
+                        <a:t>2,8 ÷ 20</a:t>
                       </a:r>
                     </a:p>
                   </a:txBody>
@@ -15397,7 +15397,7 @@
                           <a:ea typeface="+mn-ea"/>
                           <a:cs typeface="+mn-cs"/>
                         </a:rPr>
-                        <a:t>2.3 × 20</a:t>
+                        <a:t>2,3 × 20</a:t>
                       </a:r>
                     </a:p>
                   </a:txBody>
@@ -15653,7 +15653,7 @@
                           <a:ea typeface="+mn-ea"/>
                           <a:cs typeface="+mn-cs"/>
                         </a:rPr>
-                        <a:t>1.2 × 30</a:t>
+                        <a:t>1,2 × 30</a:t>
                       </a:r>
                     </a:p>
                   </a:txBody>
@@ -15743,7 +15743,7 @@
                           <a:ea typeface="+mn-ea"/>
                           <a:cs typeface="+mn-cs"/>
                         </a:rPr>
-                        <a:t>4.2 × 200</a:t>
+                        <a:t>4,2 × 200</a:t>
                       </a:r>
                     </a:p>
                   </a:txBody>
@@ -15826,7 +15826,7 @@
                           <a:ea typeface="+mn-ea"/>
                           <a:cs typeface="+mn-cs"/>
                         </a:rPr>
-                        <a:t>1.1 × 3000</a:t>
+                        <a:t>1,1 × 3000</a:t>
                       </a:r>
                     </a:p>
                   </a:txBody>
@@ -15916,7 +15916,7 @@
                           <a:ea typeface="+mn-ea"/>
                           <a:cs typeface="+mn-cs"/>
                         </a:rPr>
-                        <a:t>3.4 × 2000</a:t>
+                        <a:t>3,4 × 2000</a:t>
                       </a:r>
                     </a:p>
                   </a:txBody>
@@ -16172,7 +16172,7 @@
                           <a:ea typeface="+mn-ea"/>
                           <a:cs typeface="+mn-cs"/>
                         </a:rPr>
-                        <a:t>3.6 ÷ 30</a:t>
+                        <a:t>3,6 ÷ 30</a:t>
                       </a:r>
                     </a:p>
                   </a:txBody>
@@ -16345,7 +16345,7 @@
                           <a:ea typeface="+mn-ea"/>
                           <a:cs typeface="+mn-cs"/>
                         </a:rPr>
-                        <a:t>2.4 ÷ 100</a:t>
+                        <a:t>2,4 ÷ 100</a:t>
                       </a:r>
                     </a:p>
                   </a:txBody>
@@ -16518,7 +16518,7 @@
                           <a:ea typeface="+mn-ea"/>
                           <a:cs typeface="+mn-cs"/>
                         </a:rPr>
-                        <a:t>1.9 × 1000</a:t>
+                        <a:t>1,9 × 1000</a:t>
                       </a:r>
                     </a:p>
                   </a:txBody>
@@ -16781,7 +16781,7 @@
                           <a:ea typeface="+mn-ea"/>
                           <a:cs typeface="+mn-cs"/>
                         </a:rPr>
-                        <a:t>3.1 × 2000</a:t>
+                        <a:t>3,1 × 2000</a:t>
                       </a:r>
                     </a:p>
                   </a:txBody>
@@ -16864,7 +16864,7 @@
                           <a:ea typeface="+mn-ea"/>
                           <a:cs typeface="+mn-cs"/>
                         </a:rPr>
-                        <a:t>0.2 × 300</a:t>
+                        <a:t>0,2 × 300</a:t>
                       </a:r>
                     </a:p>
                   </a:txBody>
@@ -16954,7 +16954,7 @@
                           <a:ea typeface="+mn-ea"/>
                           <a:cs typeface="+mn-cs"/>
                         </a:rPr>
-                        <a:t>0.9 ÷ 300</a:t>
+                        <a:t>0,9 ÷ 300</a:t>
                       </a:r>
                     </a:p>
                   </a:txBody>
@@ -17127,7 +17127,7 @@
                           <a:ea typeface="+mn-ea"/>
                           <a:cs typeface="+mn-cs"/>
                         </a:rPr>
-                        <a:t>0.9 × 100</a:t>
+                        <a:t>0,9 × 100</a:t>
                       </a:r>
                     </a:p>
                   </a:txBody>
@@ -17210,7 +17210,7 @@
                           <a:ea typeface="+mn-ea"/>
                           <a:cs typeface="+mn-cs"/>
                         </a:rPr>
-                        <a:t>0.3 × 3000</a:t>
+                        <a:t>0,3 × 3000</a:t>
                       </a:r>
                     </a:p>
                   </a:txBody>

--- a/media/resources/files/ButunSandardyJanaOnduktardyKoboytuuBoluu-10-100-1000-KataryMNTort.pptx
+++ b/media/resources/files/ButunSandardyJanaOnduktardyKoboytuuBoluu-10-100-1000-KataryMNTort.pptx
@@ -8538,7 +8538,7 @@
                           <a:ea typeface="+mn-ea"/>
                           <a:cs typeface="+mn-cs"/>
                         </a:rPr>
-                        <a:t>93000 ÷ 300</a:t>
+                        <a:t>93 000 ÷ 300</a:t>
                       </a:r>
                     </a:p>
                   </a:txBody>
@@ -15051,7 +15051,7 @@
                           <a:ea typeface="+mn-ea"/>
                           <a:cs typeface="+mn-cs"/>
                         </a:rPr>
-                        <a:t>93000 ÷ 300</a:t>
+                        <a:t>93 000 ÷ 300</a:t>
                       </a:r>
                     </a:p>
                   </a:txBody>
